--- a/presentation/what google knows.pptx
+++ b/presentation/what google knows.pptx
@@ -5,7 +5,7 @@
     <p:sldMasterId id="2147483648" r:id="rId1"/>
   </p:sldMasterIdLst>
   <p:notesMasterIdLst>
-    <p:notesMasterId r:id="rId10"/>
+    <p:notesMasterId r:id="rId12"/>
   </p:notesMasterIdLst>
   <p:sldIdLst>
     <p:sldId id="256" r:id="rId4"/>
@@ -14,6 +14,8 @@
     <p:sldId id="259" r:id="rId7"/>
     <p:sldId id="260" r:id="rId8"/>
     <p:sldId id="261" r:id="rId9"/>
+    <p:sldId id="262" r:id="rId10"/>
+    <p:sldId id="263" r:id="rId11"/>
   </p:sldIdLst>
   <p:sldSz cx="12192000" cy="6858000"/>
   <p:notesSz cx="6858000" cy="9144000"/>
@@ -139,7 +141,7 @@
       </p:grpSpPr>
       <p:sp>
         <p:nvSpPr>
-          <p:cNvPr id="2" name="Header Placeholder 1"/>
+          <p:cNvPr id="1558203544" name="Header Placeholder 1"/>
           <p:cNvSpPr>
             <a:spLocks noGrp="1"/>
           </p:cNvSpPr>
@@ -173,7 +175,7 @@
       </p:sp>
       <p:sp>
         <p:nvSpPr>
-          <p:cNvPr id="3" name="Date Placeholder 2"/>
+          <p:cNvPr id="2049123906" name="Date Placeholder 2"/>
           <p:cNvSpPr>
             <a:spLocks noGrp="1"/>
           </p:cNvSpPr>
@@ -207,7 +209,7 @@
       </p:sp>
       <p:sp>
         <p:nvSpPr>
-          <p:cNvPr id="3" name="Date Placeholder 2"/>
+          <p:cNvPr id="1656920699" name="Date Placeholder 2"/>
           <p:cNvSpPr>
             <a:spLocks noGrp="1"/>
           </p:cNvSpPr>
@@ -241,7 +243,7 @@
       </p:sp>
       <p:sp>
         <p:nvSpPr>
-          <p:cNvPr id="5" name="Notes Placeholder 4"/>
+          <p:cNvPr id="619691206" name="Notes Placeholder 4"/>
           <p:cNvSpPr>
             <a:spLocks noGrp="1"/>
           </p:cNvSpPr>
@@ -271,7 +273,7 @@
       </p:sp>
       <p:sp>
         <p:nvSpPr>
-          <p:cNvPr id="6" name="Footer Placeholder 5"/>
+          <p:cNvPr id="1920592157" name="Footer Placeholder 5"/>
           <p:cNvSpPr>
             <a:spLocks noGrp="1"/>
           </p:cNvSpPr>
@@ -305,7 +307,7 @@
       </p:sp>
       <p:sp>
         <p:nvSpPr>
-          <p:cNvPr id="7" name="Slide Number Placeholder 6"/>
+          <p:cNvPr id="734225564" name="Slide Number Placeholder 6"/>
           <p:cNvSpPr>
             <a:spLocks noGrp="1"/>
           </p:cNvSpPr>
@@ -455,7 +457,7 @@
       </p:grpSpPr>
       <p:sp>
         <p:nvSpPr>
-          <p:cNvPr id="2" name="Slide Image Placeholder 1"/>
+          <p:cNvPr id="379756180" name="Slide Image Placeholder 1"/>
           <p:cNvSpPr>
             <a:spLocks noChangeAspect="1" noGrp="1" noRot="1"/>
           </p:cNvSpPr>
@@ -467,7 +469,7 @@
       </p:sp>
       <p:sp>
         <p:nvSpPr>
-          <p:cNvPr id="3" name="Notes Placeholder 2"/>
+          <p:cNvPr id="367679131" name="Notes Placeholder 2"/>
           <p:cNvSpPr>
             <a:spLocks noGrp="1"/>
           </p:cNvSpPr>
@@ -489,7 +491,7 @@
       </p:sp>
       <p:sp>
         <p:nvSpPr>
-          <p:cNvPr id="4" name="Slide Number Placeholder 3"/>
+          <p:cNvPr id="1838593778" name="Slide Number Placeholder 3"/>
           <p:cNvSpPr>
             <a:spLocks noGrp="1"/>
           </p:cNvSpPr>
@@ -540,7 +542,7 @@
       </p:grpSpPr>
       <p:sp>
         <p:nvSpPr>
-          <p:cNvPr id="2" name="Slide Image Placeholder 1"/>
+          <p:cNvPr id="748958941" name="Slide Image Placeholder 1"/>
           <p:cNvSpPr>
             <a:spLocks noChangeAspect="1" noGrp="1" noRot="1"/>
           </p:cNvSpPr>
@@ -552,7 +554,7 @@
       </p:sp>
       <p:sp>
         <p:nvSpPr>
-          <p:cNvPr id="3" name="Notes Placeholder 2"/>
+          <p:cNvPr id="1034319938" name="Notes Placeholder 2"/>
           <p:cNvSpPr>
             <a:spLocks noGrp="1"/>
           </p:cNvSpPr>
@@ -574,7 +576,7 @@
       </p:sp>
       <p:sp>
         <p:nvSpPr>
-          <p:cNvPr id="4" name="Slide Number Placeholder 3"/>
+          <p:cNvPr id="528104643" name="Slide Number Placeholder 3"/>
           <p:cNvSpPr>
             <a:spLocks noGrp="1"/>
           </p:cNvSpPr>
@@ -625,7 +627,7 @@
       </p:grpSpPr>
       <p:sp>
         <p:nvSpPr>
-          <p:cNvPr id="918052066" name="Slide Image Placeholder 1"/>
+          <p:cNvPr id="1664177185" name="Slide Image Placeholder 1"/>
           <p:cNvSpPr>
             <a:spLocks noChangeAspect="1" noGrp="1" noRot="1"/>
           </p:cNvSpPr>
@@ -637,7 +639,7 @@
       </p:sp>
       <p:sp>
         <p:nvSpPr>
-          <p:cNvPr id="1904475902" name="Notes Placeholder 2"/>
+          <p:cNvPr id="1968866865" name="Notes Placeholder 2"/>
           <p:cNvSpPr>
             <a:spLocks noGrp="1"/>
           </p:cNvSpPr>
@@ -659,7 +661,7 @@
       </p:sp>
       <p:sp>
         <p:nvSpPr>
-          <p:cNvPr id="1746062329" name="Slide Number Placeholder 3"/>
+          <p:cNvPr id="870748161" name="Slide Number Placeholder 3"/>
           <p:cNvSpPr>
             <a:spLocks noGrp="1"/>
           </p:cNvSpPr>
@@ -710,7 +712,7 @@
       </p:grpSpPr>
       <p:sp>
         <p:nvSpPr>
-          <p:cNvPr id="779971052" name="Slide Image Placeholder 1"/>
+          <p:cNvPr id="510235722" name="Slide Image Placeholder 1"/>
           <p:cNvSpPr>
             <a:spLocks noChangeAspect="1" noGrp="1" noRot="1"/>
           </p:cNvSpPr>
@@ -722,7 +724,7 @@
       </p:sp>
       <p:sp>
         <p:nvSpPr>
-          <p:cNvPr id="846865621" name="Notes Placeholder 2"/>
+          <p:cNvPr id="1116228839" name="Notes Placeholder 2"/>
           <p:cNvSpPr>
             <a:spLocks noGrp="1"/>
           </p:cNvSpPr>
@@ -744,7 +746,7 @@
       </p:sp>
       <p:sp>
         <p:nvSpPr>
-          <p:cNvPr id="1668435327" name="Slide Number Placeholder 3"/>
+          <p:cNvPr id="687668290" name="Slide Number Placeholder 3"/>
           <p:cNvSpPr>
             <a:spLocks noGrp="1"/>
           </p:cNvSpPr>
@@ -795,7 +797,7 @@
       </p:grpSpPr>
       <p:sp>
         <p:nvSpPr>
-          <p:cNvPr id="87179244" name="Slide Image Placeholder 1"/>
+          <p:cNvPr id="334868682" name="Slide Image Placeholder 1"/>
           <p:cNvSpPr>
             <a:spLocks noChangeAspect="1" noGrp="1" noRot="1"/>
           </p:cNvSpPr>
@@ -807,7 +809,7 @@
       </p:sp>
       <p:sp>
         <p:nvSpPr>
-          <p:cNvPr id="142210862" name="Notes Placeholder 2"/>
+          <p:cNvPr id="1881693299" name="Notes Placeholder 2"/>
           <p:cNvSpPr>
             <a:spLocks noGrp="1"/>
           </p:cNvSpPr>
@@ -829,7 +831,7 @@
       </p:sp>
       <p:sp>
         <p:nvSpPr>
-          <p:cNvPr id="1536480089" name="Slide Number Placeholder 3"/>
+          <p:cNvPr id="1296115158" name="Slide Number Placeholder 3"/>
           <p:cNvSpPr>
             <a:spLocks noGrp="1"/>
           </p:cNvSpPr>
@@ -880,7 +882,7 @@
       </p:grpSpPr>
       <p:sp>
         <p:nvSpPr>
-          <p:cNvPr id="409771016" name="Slide Image Placeholder 1"/>
+          <p:cNvPr id="1536232574" name="Slide Image Placeholder 1"/>
           <p:cNvSpPr>
             <a:spLocks noChangeAspect="1" noGrp="1" noRot="1"/>
           </p:cNvSpPr>
@@ -892,7 +894,7 @@
       </p:sp>
       <p:sp>
         <p:nvSpPr>
-          <p:cNvPr id="1017730000" name="Notes Placeholder 2"/>
+          <p:cNvPr id="11509125" name="Notes Placeholder 2"/>
           <p:cNvSpPr>
             <a:spLocks noGrp="1"/>
           </p:cNvSpPr>
@@ -914,7 +916,7 @@
       </p:sp>
       <p:sp>
         <p:nvSpPr>
-          <p:cNvPr id="1049538628" name="Slide Number Placeholder 3"/>
+          <p:cNvPr id="1733067116" name="Slide Number Placeholder 3"/>
           <p:cNvSpPr>
             <a:spLocks noGrp="1"/>
           </p:cNvSpPr>
@@ -931,6 +933,176 @@
               <a:defRPr/>
             </a:pPr>
             <a:fld id="{712CAEAE-1C9B-6575-AC4D-83A72B6562ED}" type="slidenum">
+              <a:rPr/>
+              <a:t/>
+            </a:fld>
+            <a:endParaRPr/>
+          </a:p>
+        </p:txBody>
+      </p:sp>
+    </p:spTree>
+  </p:cSld>
+  <p:clrMapOvr>
+    <a:masterClrMapping/>
+  </p:clrMapOvr>
+</p:notes>
+</file>
+
+<file path=ppt/notesSlides/notesSlide7.xml><?xml version="1.0" encoding="utf-8"?>
+<p:notes xmlns:a="http://schemas.openxmlformats.org/drawingml/2006/main" xmlns:r="http://schemas.openxmlformats.org/officeDocument/2006/relationships" xmlns:p="http://schemas.openxmlformats.org/presentationml/2006/main" xmlns:m="http://schemas.openxmlformats.org/officeDocument/2006/math" xmlns:w="http://schemas.openxmlformats.org/wordprocessingml/2006/main">
+  <p:cSld name="">
+    <p:spTree>
+      <p:nvGrpSpPr>
+        <p:cNvPr id="1" name=""/>
+        <p:cNvGrpSpPr/>
+        <p:nvPr/>
+      </p:nvGrpSpPr>
+      <p:grpSpPr bwMode="auto">
+        <a:xfrm>
+          <a:off x="0" y="0"/>
+          <a:ext cx="0" cy="0"/>
+          <a:chOff x="0" y="0"/>
+          <a:chExt cx="0" cy="0"/>
+        </a:xfrm>
+      </p:grpSpPr>
+      <p:sp>
+        <p:nvSpPr>
+          <p:cNvPr id="468586874" name="Slide Image Placeholder 1"/>
+          <p:cNvSpPr>
+            <a:spLocks noChangeAspect="1" noGrp="1" noRot="1"/>
+          </p:cNvSpPr>
+          <p:nvPr>
+            <p:ph type="sldImg"/>
+          </p:nvPr>
+        </p:nvSpPr>
+        <p:spPr bwMode="auto"/>
+      </p:sp>
+      <p:sp>
+        <p:nvSpPr>
+          <p:cNvPr id="2097381604" name="Notes Placeholder 2"/>
+          <p:cNvSpPr>
+            <a:spLocks noGrp="1"/>
+          </p:cNvSpPr>
+          <p:nvPr>
+            <p:ph type="body" idx="1"/>
+          </p:nvPr>
+        </p:nvSpPr>
+        <p:spPr bwMode="auto"/>
+        <p:txBody>
+          <a:bodyPr/>
+          <a:lstStyle/>
+          <a:p>
+            <a:pPr>
+              <a:defRPr/>
+            </a:pPr>
+            <a:endParaRPr/>
+          </a:p>
+        </p:txBody>
+      </p:sp>
+      <p:sp>
+        <p:nvSpPr>
+          <p:cNvPr id="1944300339" name="Slide Number Placeholder 3"/>
+          <p:cNvSpPr>
+            <a:spLocks noGrp="1"/>
+          </p:cNvSpPr>
+          <p:nvPr>
+            <p:ph type="sldNum" sz="quarter" idx="10"/>
+          </p:nvPr>
+        </p:nvSpPr>
+        <p:spPr bwMode="auto"/>
+        <p:txBody>
+          <a:bodyPr/>
+          <a:lstStyle/>
+          <a:p>
+            <a:pPr>
+              <a:defRPr/>
+            </a:pPr>
+            <a:fld id="{9A5D73FB-ADBB-3668-C548-8D9940B02BC0}" type="slidenum">
+              <a:rPr/>
+              <a:t/>
+            </a:fld>
+            <a:endParaRPr/>
+          </a:p>
+        </p:txBody>
+      </p:sp>
+    </p:spTree>
+  </p:cSld>
+  <p:clrMapOvr>
+    <a:masterClrMapping/>
+  </p:clrMapOvr>
+</p:notes>
+</file>
+
+<file path=ppt/notesSlides/notesSlide8.xml><?xml version="1.0" encoding="utf-8"?>
+<p:notes xmlns:a="http://schemas.openxmlformats.org/drawingml/2006/main" xmlns:r="http://schemas.openxmlformats.org/officeDocument/2006/relationships" xmlns:p="http://schemas.openxmlformats.org/presentationml/2006/main" xmlns:m="http://schemas.openxmlformats.org/officeDocument/2006/math" xmlns:w="http://schemas.openxmlformats.org/wordprocessingml/2006/main">
+  <p:cSld name="">
+    <p:spTree>
+      <p:nvGrpSpPr>
+        <p:cNvPr id="1" name=""/>
+        <p:cNvGrpSpPr/>
+        <p:nvPr/>
+      </p:nvGrpSpPr>
+      <p:grpSpPr bwMode="auto">
+        <a:xfrm>
+          <a:off x="0" y="0"/>
+          <a:ext cx="0" cy="0"/>
+          <a:chOff x="0" y="0"/>
+          <a:chExt cx="0" cy="0"/>
+        </a:xfrm>
+      </p:grpSpPr>
+      <p:sp>
+        <p:nvSpPr>
+          <p:cNvPr id="1357424252" name="Slide Image Placeholder 1"/>
+          <p:cNvSpPr>
+            <a:spLocks noChangeAspect="1" noGrp="1" noRot="1"/>
+          </p:cNvSpPr>
+          <p:nvPr>
+            <p:ph type="sldImg"/>
+          </p:nvPr>
+        </p:nvSpPr>
+        <p:spPr bwMode="auto"/>
+      </p:sp>
+      <p:sp>
+        <p:nvSpPr>
+          <p:cNvPr id="1733716631" name="Notes Placeholder 2"/>
+          <p:cNvSpPr>
+            <a:spLocks noGrp="1"/>
+          </p:cNvSpPr>
+          <p:nvPr>
+            <p:ph type="body" idx="1"/>
+          </p:nvPr>
+        </p:nvSpPr>
+        <p:spPr bwMode="auto"/>
+        <p:txBody>
+          <a:bodyPr/>
+          <a:lstStyle/>
+          <a:p>
+            <a:pPr>
+              <a:defRPr/>
+            </a:pPr>
+            <a:endParaRPr/>
+          </a:p>
+        </p:txBody>
+      </p:sp>
+      <p:sp>
+        <p:nvSpPr>
+          <p:cNvPr id="1673544392" name="Slide Number Placeholder 3"/>
+          <p:cNvSpPr>
+            <a:spLocks noGrp="1"/>
+          </p:cNvSpPr>
+          <p:nvPr>
+            <p:ph type="sldNum" sz="quarter" idx="10"/>
+          </p:nvPr>
+        </p:nvSpPr>
+        <p:spPr bwMode="auto"/>
+        <p:txBody>
+          <a:bodyPr/>
+          <a:lstStyle/>
+          <a:p>
+            <a:pPr>
+              <a:defRPr/>
+            </a:pPr>
+            <a:fld id="{9FC16E65-F907-BC48-8606-2D6A0B82CC16}" type="slidenum">
               <a:rPr/>
               <a:t/>
             </a:fld>
@@ -972,7 +1144,7 @@
       </p:grpSpPr>
       <p:sp>
         <p:nvSpPr>
-          <p:cNvPr id="225474071" name="Tytuł 1"/>
+          <p:cNvPr id="1500749300" name="Tytuł 1"/>
           <p:cNvSpPr>
             <a:spLocks noGrp="1"/>
           </p:cNvSpPr>
@@ -1014,7 +1186,7 @@
       </p:sp>
       <p:sp>
         <p:nvSpPr>
-          <p:cNvPr id="54988351" name="Symbol zastępczy daty 3"/>
+          <p:cNvPr id="751430556" name="Symbol zastępczy daty 3"/>
           <p:cNvSpPr>
             <a:spLocks noGrp="1"/>
           </p:cNvSpPr>
@@ -1045,7 +1217,7 @@
       </p:sp>
       <p:sp>
         <p:nvSpPr>
-          <p:cNvPr id="1738629891" name="Symbol zastępczy stopki 4"/>
+          <p:cNvPr id="366826753" name="Symbol zastępczy stopki 4"/>
           <p:cNvSpPr>
             <a:spLocks noGrp="1"/>
           </p:cNvSpPr>
@@ -1067,7 +1239,7 @@
       </p:sp>
       <p:sp>
         <p:nvSpPr>
-          <p:cNvPr id="1843722384" name="Symbol zastępczy numeru slajdu 5"/>
+          <p:cNvPr id="2075992993" name="Symbol zastępczy numeru slajdu 5"/>
           <p:cNvSpPr>
             <a:spLocks noGrp="1"/>
           </p:cNvSpPr>
@@ -1102,7 +1274,7 @@
       </p:sp>
       <p:sp>
         <p:nvSpPr>
-          <p:cNvPr id="573986818" name="Symbol zastępczy tekstu 22"/>
+          <p:cNvPr id="1947235021" name="Symbol zastępczy tekstu 22"/>
           <p:cNvSpPr>
             <a:spLocks noGrp="1"/>
           </p:cNvSpPr>
@@ -1145,7 +1317,7 @@
       </p:sp>
       <p:sp>
         <p:nvSpPr>
-          <p:cNvPr id="727157711" name="Symbol zastępczy tekstu 26"/>
+          <p:cNvPr id="2037286223" name="Symbol zastępczy tekstu 26"/>
           <p:cNvSpPr>
             <a:spLocks noGrp="1"/>
           </p:cNvSpPr>
@@ -1388,7 +1560,7 @@
       </p:sp>
       <p:sp>
         <p:nvSpPr>
-          <p:cNvPr id="1903512836" name="Prostokąt 27"/>
+          <p:cNvPr id="771454585" name="Prostokąt 27"/>
           <p:cNvSpPr/>
           <p:nvPr userDrawn="1"/>
         </p:nvSpPr>
@@ -1436,7 +1608,7 @@
       </p:sp>
       <p:sp>
         <p:nvSpPr>
-          <p:cNvPr id="1172482445" name="Symbol zastępczy tekstu 22"/>
+          <p:cNvPr id="678786951" name="Symbol zastępczy tekstu 22"/>
           <p:cNvSpPr>
             <a:spLocks noGrp="1"/>
           </p:cNvSpPr>
@@ -1502,7 +1674,7 @@
       </p:sp>
       <p:pic>
         <p:nvPicPr>
-          <p:cNvPr id="819984840" name="Obraz 11" descr="Obraz zawierający Czcionka, tekst, Grafika, biały&#10;&#10;Opis wygenerowany automatycznie"/>
+          <p:cNvPr id="335140623" name="Obraz 11" descr="Obraz zawierający Czcionka, tekst, Grafika, biały&#10;&#10;Opis wygenerowany automatycznie"/>
           <p:cNvPicPr>
             <a:picLocks noChangeAspect="1"/>
           </p:cNvPicPr>
@@ -1549,7 +1721,7 @@
       </p:grpSpPr>
       <p:sp>
         <p:nvSpPr>
-          <p:cNvPr id="541915509" name="Tytuł 1"/>
+          <p:cNvPr id="1780100097" name="Tytuł 1"/>
           <p:cNvSpPr>
             <a:spLocks noGrp="1"/>
           </p:cNvSpPr>
@@ -1575,7 +1747,7 @@
       </p:sp>
       <p:sp>
         <p:nvSpPr>
-          <p:cNvPr id="1425647274" name="Symbol zastępczy tytułu pionowego 2"/>
+          <p:cNvPr id="1783321172" name="Symbol zastępczy tytułu pionowego 2"/>
           <p:cNvSpPr>
             <a:spLocks noGrp="1"/>
           </p:cNvSpPr>
@@ -1641,7 +1813,7 @@
       </p:sp>
       <p:sp>
         <p:nvSpPr>
-          <p:cNvPr id="342102749" name="Symbol zastępczy daty 3"/>
+          <p:cNvPr id="1332000690" name="Symbol zastępczy daty 3"/>
           <p:cNvSpPr>
             <a:spLocks noGrp="1"/>
           </p:cNvSpPr>
@@ -1667,7 +1839,7 @@
       </p:sp>
       <p:sp>
         <p:nvSpPr>
-          <p:cNvPr id="2094855504" name="Symbol zastępczy stopki 4"/>
+          <p:cNvPr id="1796443947" name="Symbol zastępczy stopki 4"/>
           <p:cNvSpPr>
             <a:spLocks noGrp="1"/>
           </p:cNvSpPr>
@@ -1689,7 +1861,7 @@
       </p:sp>
       <p:sp>
         <p:nvSpPr>
-          <p:cNvPr id="1625656102" name="Symbol zastępczy numeru slajdu 5"/>
+          <p:cNvPr id="145944167" name="Symbol zastępczy numeru slajdu 5"/>
           <p:cNvSpPr>
             <a:spLocks noGrp="1"/>
           </p:cNvSpPr>
@@ -1740,7 +1912,7 @@
       </p:grpSpPr>
       <p:sp>
         <p:nvSpPr>
-          <p:cNvPr id="92864175" name="Tytuł pionowy 1"/>
+          <p:cNvPr id="37870380" name="Tytuł pionowy 1"/>
           <p:cNvSpPr>
             <a:spLocks noGrp="1"/>
           </p:cNvSpPr>
@@ -1771,7 +1943,7 @@
       </p:sp>
       <p:sp>
         <p:nvSpPr>
-          <p:cNvPr id="51234937" name="Symbol zastępczy tytułu pionowego 2"/>
+          <p:cNvPr id="26084963" name="Symbol zastępczy tytułu pionowego 2"/>
           <p:cNvSpPr>
             <a:spLocks noGrp="1"/>
           </p:cNvSpPr>
@@ -1842,7 +2014,7 @@
       </p:sp>
       <p:sp>
         <p:nvSpPr>
-          <p:cNvPr id="1350710586" name="Symbol zastępczy daty 3"/>
+          <p:cNvPr id="1464345535" name="Symbol zastępczy daty 3"/>
           <p:cNvSpPr>
             <a:spLocks noGrp="1"/>
           </p:cNvSpPr>
@@ -1868,7 +2040,7 @@
       </p:sp>
       <p:sp>
         <p:nvSpPr>
-          <p:cNvPr id="1587344225" name="Symbol zastępczy stopki 4"/>
+          <p:cNvPr id="1676244582" name="Symbol zastępczy stopki 4"/>
           <p:cNvSpPr>
             <a:spLocks noGrp="1"/>
           </p:cNvSpPr>
@@ -1890,7 +2062,7 @@
       </p:sp>
       <p:sp>
         <p:nvSpPr>
-          <p:cNvPr id="134455805" name="Symbol zastępczy numeru slajdu 5"/>
+          <p:cNvPr id="1582945135" name="Symbol zastępczy numeru slajdu 5"/>
           <p:cNvSpPr>
             <a:spLocks noGrp="1"/>
           </p:cNvSpPr>
@@ -1948,7 +2120,7 @@
       </p:grpSpPr>
       <p:sp>
         <p:nvSpPr>
-          <p:cNvPr id="165074043" name="Symbol zastępczy zawartości 2"/>
+          <p:cNvPr id="1436097962" name="Symbol zastępczy zawartości 2"/>
           <p:cNvSpPr>
             <a:spLocks noGrp="1"/>
           </p:cNvSpPr>
@@ -2075,7 +2247,7 @@
       </p:sp>
       <p:sp>
         <p:nvSpPr>
-          <p:cNvPr id="911947180" name="Symbol zastępczy daty 3"/>
+          <p:cNvPr id="1816792507" name="Symbol zastępczy daty 3"/>
           <p:cNvSpPr>
             <a:spLocks noGrp="1"/>
           </p:cNvSpPr>
@@ -2101,7 +2273,7 @@
       </p:sp>
       <p:sp>
         <p:nvSpPr>
-          <p:cNvPr id="92109954" name="Symbol zastępczy stopki 4"/>
+          <p:cNvPr id="1396181986" name="Symbol zastępczy stopki 4"/>
           <p:cNvSpPr>
             <a:spLocks noGrp="1"/>
           </p:cNvSpPr>
@@ -2123,7 +2295,7 @@
       </p:sp>
       <p:sp>
         <p:nvSpPr>
-          <p:cNvPr id="2100813550" name="Symbol zastępczy numeru slajdu 5"/>
+          <p:cNvPr id="311170001" name="Symbol zastępczy numeru slajdu 5"/>
           <p:cNvSpPr>
             <a:spLocks noGrp="1"/>
           </p:cNvSpPr>
@@ -2149,7 +2321,7 @@
       </p:sp>
       <p:sp>
         <p:nvSpPr>
-          <p:cNvPr id="1819441296" name="Symbol zastępczy zawartości 8"/>
+          <p:cNvPr id="774076816" name="Symbol zastępczy zawartości 8"/>
           <p:cNvSpPr>
             <a:spLocks noGrp="1"/>
           </p:cNvSpPr>
@@ -2190,7 +2362,7 @@
       </p:sp>
       <p:sp>
         <p:nvSpPr>
-          <p:cNvPr id="1963418468" name="Symbol zastępczy tekstu 22"/>
+          <p:cNvPr id="1588012621" name="Symbol zastępczy tekstu 22"/>
           <p:cNvSpPr>
             <a:spLocks noGrp="1"/>
           </p:cNvSpPr>
@@ -2258,7 +2430,7 @@
       </p:grpSpPr>
       <p:sp>
         <p:nvSpPr>
-          <p:cNvPr id="1810663476" name="Tytuł 1"/>
+          <p:cNvPr id="1134689513" name="Tytuł 1"/>
           <p:cNvSpPr>
             <a:spLocks noGrp="1"/>
           </p:cNvSpPr>
@@ -2293,7 +2465,7 @@
       </p:sp>
       <p:sp>
         <p:nvSpPr>
-          <p:cNvPr id="353668904" name="Symbol zastępczy tekstu 2"/>
+          <p:cNvPr id="1726189504" name="Symbol zastępczy tekstu 2"/>
           <p:cNvSpPr>
             <a:spLocks noGrp="1"/>
           </p:cNvSpPr>
@@ -2415,7 +2587,7 @@
       </p:sp>
       <p:sp>
         <p:nvSpPr>
-          <p:cNvPr id="1187150050" name="Symbol zastępczy daty 3"/>
+          <p:cNvPr id="103234441" name="Symbol zastępczy daty 3"/>
           <p:cNvSpPr>
             <a:spLocks noGrp="1"/>
           </p:cNvSpPr>
@@ -2441,7 +2613,7 @@
       </p:sp>
       <p:sp>
         <p:nvSpPr>
-          <p:cNvPr id="161677263" name="Symbol zastępczy stopki 4"/>
+          <p:cNvPr id="497562873" name="Symbol zastępczy stopki 4"/>
           <p:cNvSpPr>
             <a:spLocks noGrp="1"/>
           </p:cNvSpPr>
@@ -2463,7 +2635,7 @@
       </p:sp>
       <p:sp>
         <p:nvSpPr>
-          <p:cNvPr id="151741609" name="Symbol zastępczy numeru slajdu 5"/>
+          <p:cNvPr id="130179056" name="Symbol zastępczy numeru slajdu 5"/>
           <p:cNvSpPr>
             <a:spLocks noGrp="1"/>
           </p:cNvSpPr>
@@ -2514,7 +2686,7 @@
       </p:grpSpPr>
       <p:sp>
         <p:nvSpPr>
-          <p:cNvPr id="1205992496" name="Tytuł 1"/>
+          <p:cNvPr id="105065250" name="Tytuł 1"/>
           <p:cNvSpPr>
             <a:spLocks noGrp="1"/>
           </p:cNvSpPr>
@@ -2540,7 +2712,7 @@
       </p:sp>
       <p:sp>
         <p:nvSpPr>
-          <p:cNvPr id="452793918" name="Symbol zastępczy zawartości 2"/>
+          <p:cNvPr id="2086792939" name="Symbol zastępczy zawartości 2"/>
           <p:cNvSpPr>
             <a:spLocks noGrp="1"/>
           </p:cNvSpPr>
@@ -2611,7 +2783,7 @@
       </p:sp>
       <p:sp>
         <p:nvSpPr>
-          <p:cNvPr id="549234569" name="Symbol zastępczy zawartości 3"/>
+          <p:cNvPr id="1859208896" name="Symbol zastępczy zawartości 3"/>
           <p:cNvSpPr>
             <a:spLocks noGrp="1"/>
           </p:cNvSpPr>
@@ -2682,7 +2854,7 @@
       </p:sp>
       <p:sp>
         <p:nvSpPr>
-          <p:cNvPr id="114897161" name="Symbol zastępczy daty 4"/>
+          <p:cNvPr id="885995631" name="Symbol zastępczy daty 4"/>
           <p:cNvSpPr>
             <a:spLocks noGrp="1"/>
           </p:cNvSpPr>
@@ -2708,7 +2880,7 @@
       </p:sp>
       <p:sp>
         <p:nvSpPr>
-          <p:cNvPr id="1917369938" name="Symbol zastępczy stopki 5"/>
+          <p:cNvPr id="1120969787" name="Symbol zastępczy stopki 5"/>
           <p:cNvSpPr>
             <a:spLocks noGrp="1"/>
           </p:cNvSpPr>
@@ -2730,7 +2902,7 @@
       </p:sp>
       <p:sp>
         <p:nvSpPr>
-          <p:cNvPr id="581937789" name="Symbol zastępczy numeru slajdu 6"/>
+          <p:cNvPr id="825807391" name="Symbol zastępczy numeru slajdu 6"/>
           <p:cNvSpPr>
             <a:spLocks noGrp="1"/>
           </p:cNvSpPr>
@@ -2781,7 +2953,7 @@
       </p:grpSpPr>
       <p:sp>
         <p:nvSpPr>
-          <p:cNvPr id="1277298663" name="Symbol zastępczy tekstu 2"/>
+          <p:cNvPr id="838131232" name="Symbol zastępczy tekstu 2"/>
           <p:cNvSpPr>
             <a:spLocks noGrp="1"/>
           </p:cNvSpPr>
@@ -2849,7 +3021,7 @@
       </p:sp>
       <p:sp>
         <p:nvSpPr>
-          <p:cNvPr id="1311232512" name="Symbol zastępczy zawartości 3"/>
+          <p:cNvPr id="505830901" name="Symbol zastępczy zawartości 3"/>
           <p:cNvSpPr>
             <a:spLocks noGrp="1"/>
           </p:cNvSpPr>
@@ -2920,7 +3092,7 @@
       </p:sp>
       <p:sp>
         <p:nvSpPr>
-          <p:cNvPr id="2103374293" name="Symbol zastępczy tekstu 4"/>
+          <p:cNvPr id="1585631906" name="Symbol zastępczy tekstu 4"/>
           <p:cNvSpPr>
             <a:spLocks noGrp="1"/>
           </p:cNvSpPr>
@@ -2988,7 +3160,7 @@
       </p:sp>
       <p:sp>
         <p:nvSpPr>
-          <p:cNvPr id="716716016" name="Symbol zastępczy zawartości 5"/>
+          <p:cNvPr id="672006075" name="Symbol zastępczy zawartości 5"/>
           <p:cNvSpPr>
             <a:spLocks noGrp="1"/>
           </p:cNvSpPr>
@@ -3059,7 +3231,7 @@
       </p:sp>
       <p:sp>
         <p:nvSpPr>
-          <p:cNvPr id="97669060" name="Symbol zastępczy daty 6"/>
+          <p:cNvPr id="1963136953" name="Symbol zastępczy daty 6"/>
           <p:cNvSpPr>
             <a:spLocks noGrp="1"/>
           </p:cNvSpPr>
@@ -3085,7 +3257,7 @@
       </p:sp>
       <p:sp>
         <p:nvSpPr>
-          <p:cNvPr id="997752141" name="Symbol zastępczy stopki 7"/>
+          <p:cNvPr id="1953194396" name="Symbol zastępczy stopki 7"/>
           <p:cNvSpPr>
             <a:spLocks noGrp="1"/>
           </p:cNvSpPr>
@@ -3107,7 +3279,7 @@
       </p:sp>
       <p:sp>
         <p:nvSpPr>
-          <p:cNvPr id="1318540242" name="Symbol zastępczy numeru slajdu 8"/>
+          <p:cNvPr id="1046864759" name="Symbol zastępczy numeru slajdu 8"/>
           <p:cNvSpPr>
             <a:spLocks noGrp="1"/>
           </p:cNvSpPr>
@@ -3133,7 +3305,7 @@
       </p:sp>
       <p:sp>
         <p:nvSpPr>
-          <p:cNvPr id="417119750" name="Symbol zastępczy tytułu 1"/>
+          <p:cNvPr id="765378917" name="Symbol zastępczy tytułu 1"/>
           <p:cNvSpPr>
             <a:spLocks noGrp="1"/>
           </p:cNvSpPr>
@@ -3194,7 +3366,7 @@
       </p:grpSpPr>
       <p:sp>
         <p:nvSpPr>
-          <p:cNvPr id="507221591" name="Tytuł 1"/>
+          <p:cNvPr id="1147480549" name="Tytuł 1"/>
           <p:cNvSpPr>
             <a:spLocks noGrp="1"/>
           </p:cNvSpPr>
@@ -3220,7 +3392,7 @@
       </p:sp>
       <p:sp>
         <p:nvSpPr>
-          <p:cNvPr id="444396791" name="Symbol zastępczy daty 2"/>
+          <p:cNvPr id="857678555" name="Symbol zastępczy daty 2"/>
           <p:cNvSpPr>
             <a:spLocks noGrp="1"/>
           </p:cNvSpPr>
@@ -3246,7 +3418,7 @@
       </p:sp>
       <p:sp>
         <p:nvSpPr>
-          <p:cNvPr id="152557290" name="Symbol zastępczy stopki 3"/>
+          <p:cNvPr id="270992246" name="Symbol zastępczy stopki 3"/>
           <p:cNvSpPr>
             <a:spLocks noGrp="1"/>
           </p:cNvSpPr>
@@ -3268,7 +3440,7 @@
       </p:sp>
       <p:sp>
         <p:nvSpPr>
-          <p:cNvPr id="1856429843" name="Symbol zastępczy numeru slajdu 4"/>
+          <p:cNvPr id="1705279188" name="Symbol zastępczy numeru slajdu 4"/>
           <p:cNvSpPr>
             <a:spLocks noGrp="1"/>
           </p:cNvSpPr>
@@ -3319,7 +3491,7 @@
       </p:grpSpPr>
       <p:sp>
         <p:nvSpPr>
-          <p:cNvPr id="1147870331" name="Symbol zastępczy daty 1"/>
+          <p:cNvPr id="18242563" name="Symbol zastępczy daty 1"/>
           <p:cNvSpPr>
             <a:spLocks noGrp="1"/>
           </p:cNvSpPr>
@@ -3345,7 +3517,7 @@
       </p:sp>
       <p:sp>
         <p:nvSpPr>
-          <p:cNvPr id="1812944976" name="Symbol zastępczy stopki 2"/>
+          <p:cNvPr id="2038684545" name="Symbol zastępczy stopki 2"/>
           <p:cNvSpPr>
             <a:spLocks noGrp="1"/>
           </p:cNvSpPr>
@@ -3367,7 +3539,7 @@
       </p:sp>
       <p:sp>
         <p:nvSpPr>
-          <p:cNvPr id="1281441956" name="Symbol zastępczy numeru slajdu 3"/>
+          <p:cNvPr id="1403615146" name="Symbol zastępczy numeru slajdu 3"/>
           <p:cNvSpPr>
             <a:spLocks noGrp="1"/>
           </p:cNvSpPr>
@@ -3418,7 +3590,7 @@
       </p:grpSpPr>
       <p:sp>
         <p:nvSpPr>
-          <p:cNvPr id="666369051" name="Tytuł 1"/>
+          <p:cNvPr id="1927120488" name="Tytuł 1"/>
           <p:cNvSpPr>
             <a:spLocks noGrp="1"/>
           </p:cNvSpPr>
@@ -3453,7 +3625,7 @@
       </p:sp>
       <p:sp>
         <p:nvSpPr>
-          <p:cNvPr id="649347430" name="Symbol zastępczy zawartości 2"/>
+          <p:cNvPr id="1420586605" name="Symbol zastępczy zawartości 2"/>
           <p:cNvSpPr>
             <a:spLocks noGrp="1"/>
           </p:cNvSpPr>
@@ -3552,7 +3724,7 @@
       </p:sp>
       <p:sp>
         <p:nvSpPr>
-          <p:cNvPr id="935786299" name="Symbol zastępczy tekstu 3"/>
+          <p:cNvPr id="2118372113" name="Symbol zastępczy tekstu 3"/>
           <p:cNvSpPr>
             <a:spLocks noGrp="1"/>
           </p:cNvSpPr>
@@ -3620,7 +3792,7 @@
       </p:sp>
       <p:sp>
         <p:nvSpPr>
-          <p:cNvPr id="1824904242" name="Symbol zastępczy daty 4"/>
+          <p:cNvPr id="500556221" name="Symbol zastępczy daty 4"/>
           <p:cNvSpPr>
             <a:spLocks noGrp="1"/>
           </p:cNvSpPr>
@@ -3646,7 +3818,7 @@
       </p:sp>
       <p:sp>
         <p:nvSpPr>
-          <p:cNvPr id="1081056748" name="Symbol zastępczy stopki 5"/>
+          <p:cNvPr id="359940568" name="Symbol zastępczy stopki 5"/>
           <p:cNvSpPr>
             <a:spLocks noGrp="1"/>
           </p:cNvSpPr>
@@ -3668,7 +3840,7 @@
       </p:sp>
       <p:sp>
         <p:nvSpPr>
-          <p:cNvPr id="376182913" name="Symbol zastępczy numeru slajdu 6"/>
+          <p:cNvPr id="1411484667" name="Symbol zastępczy numeru slajdu 6"/>
           <p:cNvSpPr>
             <a:spLocks noGrp="1"/>
           </p:cNvSpPr>
@@ -3719,7 +3891,7 @@
       </p:grpSpPr>
       <p:sp>
         <p:nvSpPr>
-          <p:cNvPr id="589136819" name="Tytuł 1"/>
+          <p:cNvPr id="228552599" name="Tytuł 1"/>
           <p:cNvSpPr>
             <a:spLocks noGrp="1"/>
           </p:cNvSpPr>
@@ -3754,7 +3926,7 @@
       </p:sp>
       <p:sp>
         <p:nvSpPr>
-          <p:cNvPr id="269773612" name="Symbol zastępczy obrazu 2"/>
+          <p:cNvPr id="1427393466" name="Symbol zastępczy obrazu 2"/>
           <p:cNvSpPr>
             <a:spLocks noGrp="1"/>
           </p:cNvSpPr>
@@ -3818,7 +3990,7 @@
       </p:sp>
       <p:sp>
         <p:nvSpPr>
-          <p:cNvPr id="1183703609" name="Symbol zastępczy tekstu 3"/>
+          <p:cNvPr id="1504609154" name="Symbol zastępczy tekstu 3"/>
           <p:cNvSpPr>
             <a:spLocks noGrp="1"/>
           </p:cNvSpPr>
@@ -3886,7 +4058,7 @@
       </p:sp>
       <p:sp>
         <p:nvSpPr>
-          <p:cNvPr id="1604221652" name="Symbol zastępczy daty 4"/>
+          <p:cNvPr id="1297100158" name="Symbol zastępczy daty 4"/>
           <p:cNvSpPr>
             <a:spLocks noGrp="1"/>
           </p:cNvSpPr>
@@ -3912,7 +4084,7 @@
       </p:sp>
       <p:sp>
         <p:nvSpPr>
-          <p:cNvPr id="177925966" name="Symbol zastępczy stopki 5"/>
+          <p:cNvPr id="556437225" name="Symbol zastępczy stopki 5"/>
           <p:cNvSpPr>
             <a:spLocks noGrp="1"/>
           </p:cNvSpPr>
@@ -3934,7 +4106,7 @@
       </p:sp>
       <p:sp>
         <p:nvSpPr>
-          <p:cNvPr id="779516491" name="Symbol zastępczy numeru slajdu 6"/>
+          <p:cNvPr id="1579212441" name="Symbol zastępczy numeru slajdu 6"/>
           <p:cNvSpPr>
             <a:spLocks noGrp="1"/>
           </p:cNvSpPr>
@@ -3990,7 +4162,7 @@
       </p:grpSpPr>
       <p:sp>
         <p:nvSpPr>
-          <p:cNvPr id="71680926" name="Prostokąt 10"/>
+          <p:cNvPr id="1242379292" name="Prostokąt 10"/>
           <p:cNvSpPr/>
           <p:nvPr userDrawn="1"/>
         </p:nvSpPr>
@@ -4038,7 +4210,7 @@
       </p:sp>
       <p:sp>
         <p:nvSpPr>
-          <p:cNvPr id="351521549" name="Symbol zastępczy tekstu 22"/>
+          <p:cNvPr id="1212068376" name="Symbol zastępczy tekstu 22"/>
           <p:cNvSpPr txBox="1"/>
           <p:nvPr userDrawn="1"/>
         </p:nvSpPr>
@@ -4257,7 +4429,7 @@
       </p:sp>
       <p:sp>
         <p:nvSpPr>
-          <p:cNvPr id="2087458790" name="Symbol zastępczy tytułu 1"/>
+          <p:cNvPr id="630696663" name="Symbol zastępczy tytułu 1"/>
           <p:cNvSpPr>
             <a:spLocks noGrp="1"/>
           </p:cNvSpPr>
@@ -4293,7 +4465,7 @@
       </p:sp>
       <p:sp>
         <p:nvSpPr>
-          <p:cNvPr id="1648192558" name="Symbol zastępczy tekstu 2"/>
+          <p:cNvPr id="1239225615" name="Symbol zastępczy tekstu 2"/>
           <p:cNvSpPr>
             <a:spLocks noGrp="1"/>
           </p:cNvSpPr>
@@ -4369,7 +4541,7 @@
       </p:sp>
       <p:sp>
         <p:nvSpPr>
-          <p:cNvPr id="1083527072" name="Symbol zastępczy daty 3"/>
+          <p:cNvPr id="1984606040" name="Symbol zastępczy daty 3"/>
           <p:cNvSpPr>
             <a:spLocks noGrp="1"/>
           </p:cNvSpPr>
@@ -4413,7 +4585,7 @@
       </p:sp>
       <p:sp>
         <p:nvSpPr>
-          <p:cNvPr id="274369643" name="Symbol zastępczy stopki 4"/>
+          <p:cNvPr id="569190259" name="Symbol zastępczy stopki 4"/>
           <p:cNvSpPr>
             <a:spLocks noGrp="1"/>
           </p:cNvSpPr>
@@ -4453,7 +4625,7 @@
       </p:sp>
       <p:sp>
         <p:nvSpPr>
-          <p:cNvPr id="997878056" name="Symbol zastępczy numeru slajdu 5"/>
+          <p:cNvPr id="583668234" name="Symbol zastępczy numeru slajdu 5"/>
           <p:cNvSpPr>
             <a:spLocks noGrp="1"/>
           </p:cNvSpPr>
@@ -4497,7 +4669,7 @@
       </p:sp>
       <p:pic>
         <p:nvPicPr>
-          <p:cNvPr id="266206127" name="Obraz 11" descr="Obraz zawierający Czcionka, tekst, Grafika, biały&#10;&#10;Opis wygenerowany automatycznie"/>
+          <p:cNvPr id="541805068" name="Obraz 11" descr="Obraz zawierający Czcionka, tekst, Grafika, biały&#10;&#10;Opis wygenerowany automatycznie"/>
           <p:cNvPicPr>
             <a:picLocks noChangeAspect="1"/>
           </p:cNvPicPr>
@@ -4851,7 +5023,7 @@
       </p:grpSpPr>
       <p:sp>
         <p:nvSpPr>
-          <p:cNvPr id="1169536331" name="Tytuł 1"/>
+          <p:cNvPr id="1067383788" name="Tytuł 1"/>
           <p:cNvSpPr>
             <a:spLocks noGrp="1"/>
           </p:cNvSpPr>
@@ -4895,7 +5067,7 @@
       </p:sp>
       <p:sp>
         <p:nvSpPr>
-          <p:cNvPr id="90688667" name="Symbol zastępczy tekstu 2"/>
+          <p:cNvPr id="518463300" name="Symbol zastępczy tekstu 2"/>
           <p:cNvSpPr>
             <a:spLocks noGrp="1"/>
           </p:cNvSpPr>
@@ -4917,7 +5089,7 @@
       </p:sp>
       <p:sp>
         <p:nvSpPr>
-          <p:cNvPr id="991720346" name="Symbol zastępczy tekstu 3"/>
+          <p:cNvPr id="454128068" name="Symbol zastępczy tekstu 3"/>
           <p:cNvSpPr>
             <a:spLocks noGrp="1"/>
           </p:cNvSpPr>
@@ -4939,7 +5111,7 @@
       </p:sp>
       <p:sp>
         <p:nvSpPr>
-          <p:cNvPr id="402077317" name="Symbol zastępczy tekstu 4"/>
+          <p:cNvPr id="1197144777" name="Symbol zastępczy tekstu 4"/>
           <p:cNvSpPr>
             <a:spLocks noGrp="1"/>
           </p:cNvSpPr>
@@ -5039,7 +5211,7 @@
       </p:grpSpPr>
       <p:sp>
         <p:nvSpPr>
-          <p:cNvPr id="1754216454" name="Symbol zastępczy zawartości 1"/>
+          <p:cNvPr id="1682399181" name="Symbol zastępczy zawartości 1"/>
           <p:cNvSpPr>
             <a:spLocks noGrp="1"/>
           </p:cNvSpPr>
@@ -5194,7 +5366,7 @@
       </p:sp>
       <p:sp>
         <p:nvSpPr>
-          <p:cNvPr id="1031586609" name="Symbol zastępczy tekstu 3"/>
+          <p:cNvPr id="1097303451" name="Symbol zastępczy tekstu 3"/>
           <p:cNvSpPr>
             <a:spLocks noGrp="1"/>
           </p:cNvSpPr>
@@ -5228,7 +5400,7 @@
       </p:sp>
       <p:sp>
         <p:nvSpPr>
-          <p:cNvPr id="302448000" name="Symbol zastępczy numeru slajdu 5"/>
+          <p:cNvPr id="318880584" name="Symbol zastępczy numeru slajdu 5"/>
           <p:cNvSpPr>
             <a:spLocks noGrp="1"/>
           </p:cNvSpPr>
@@ -5294,7 +5466,7 @@
       </p:grpSpPr>
       <p:sp>
         <p:nvSpPr>
-          <p:cNvPr id="929548757" name="Symbol zastępczy zawartości 1"/>
+          <p:cNvPr id="1925236386" name="Symbol zastępczy zawartości 1"/>
           <p:cNvSpPr>
             <a:spLocks noGrp="1"/>
           </p:cNvSpPr>
@@ -5390,7 +5562,7 @@
       </p:sp>
       <p:sp>
         <p:nvSpPr>
-          <p:cNvPr id="1384667719" name="Symbol zastępczy tekstu 3"/>
+          <p:cNvPr id="1883531748" name="Symbol zastępczy tekstu 3"/>
           <p:cNvSpPr>
             <a:spLocks noGrp="1"/>
           </p:cNvSpPr>
@@ -5423,7 +5595,7 @@
       </p:sp>
       <p:sp>
         <p:nvSpPr>
-          <p:cNvPr id="631136769" name="Symbol zastępczy numeru slajdu 5"/>
+          <p:cNvPr id="295574424" name="Symbol zastępczy numeru slajdu 5"/>
           <p:cNvSpPr>
             <a:spLocks noGrp="1"/>
           </p:cNvSpPr>
@@ -5489,7 +5661,7 @@
       </p:grpSpPr>
       <p:sp>
         <p:nvSpPr>
-          <p:cNvPr id="727500023" name="Symbol zastępczy tekstu 3"/>
+          <p:cNvPr id="1909170384" name="Symbol zastępczy tekstu 3"/>
           <p:cNvSpPr>
             <a:spLocks noGrp="1"/>
           </p:cNvSpPr>
@@ -5527,7 +5699,7 @@
       </p:sp>
       <p:sp>
         <p:nvSpPr>
-          <p:cNvPr id="102436545" name="Symbol zastępczy numeru slajdu 5"/>
+          <p:cNvPr id="539617190" name="Symbol zastępczy numeru slajdu 5"/>
           <p:cNvSpPr>
             <a:spLocks noGrp="1"/>
           </p:cNvSpPr>
@@ -5553,7 +5725,7 @@
       </p:sp>
       <p:pic>
         <p:nvPicPr>
-          <p:cNvPr id="957129330" name=""/>
+          <p:cNvPr id="405870562" name=""/>
           <p:cNvPicPr>
             <a:picLocks noChangeAspect="1"/>
           </p:cNvPicPr>
@@ -5575,7 +5747,7 @@
       </p:pic>
       <p:pic>
         <p:nvPicPr>
-          <p:cNvPr id="58177992" name=""/>
+          <p:cNvPr id="504392152" name=""/>
           <p:cNvPicPr>
             <a:picLocks noChangeAspect="1"/>
           </p:cNvPicPr>
@@ -5597,7 +5769,7 @@
       </p:pic>
       <p:pic>
         <p:nvPicPr>
-          <p:cNvPr id="1923679664" name=""/>
+          <p:cNvPr id="508842868" name=""/>
           <p:cNvPicPr>
             <a:picLocks noChangeAspect="1"/>
           </p:cNvPicPr>
@@ -5619,7 +5791,7 @@
       </p:pic>
       <p:pic>
         <p:nvPicPr>
-          <p:cNvPr id="1115974410" name=""/>
+          <p:cNvPr id="954648807" name=""/>
           <p:cNvPicPr>
             <a:picLocks noChangeAspect="1"/>
           </p:cNvPicPr>
@@ -5641,7 +5813,7 @@
       </p:pic>
       <p:pic>
         <p:nvPicPr>
-          <p:cNvPr id="2095751380" name=""/>
+          <p:cNvPr id="1869321921" name=""/>
           <p:cNvPicPr>
             <a:picLocks noChangeAspect="1"/>
           </p:cNvPicPr>
@@ -5703,7 +5875,7 @@
       </p:grpSpPr>
       <p:sp>
         <p:nvSpPr>
-          <p:cNvPr id="1118285536" name="Symbol zastępczy tekstu 3"/>
+          <p:cNvPr id="498526840" name="Symbol zastępczy tekstu 3"/>
           <p:cNvSpPr>
             <a:spLocks noGrp="1"/>
           </p:cNvSpPr>
@@ -5741,7 +5913,7 @@
       </p:sp>
       <p:sp>
         <p:nvSpPr>
-          <p:cNvPr id="2108648107" name="Symbol zastępczy numeru slajdu 5"/>
+          <p:cNvPr id="1071868982" name="Symbol zastępczy numeru slajdu 5"/>
           <p:cNvSpPr>
             <a:spLocks noGrp="1"/>
           </p:cNvSpPr>
@@ -5767,7 +5939,7 @@
       </p:sp>
       <p:pic>
         <p:nvPicPr>
-          <p:cNvPr id="233539602" name=""/>
+          <p:cNvPr id="1242626759" name=""/>
           <p:cNvPicPr>
             <a:picLocks noChangeAspect="1"/>
           </p:cNvPicPr>
@@ -5789,7 +5961,7 @@
       </p:pic>
       <p:pic>
         <p:nvPicPr>
-          <p:cNvPr id="892127691" name=""/>
+          <p:cNvPr id="820627584" name=""/>
           <p:cNvPicPr>
             <a:picLocks noChangeAspect="1"/>
           </p:cNvPicPr>
@@ -5811,7 +5983,7 @@
       </p:pic>
       <p:pic>
         <p:nvPicPr>
-          <p:cNvPr id="135993041" name=""/>
+          <p:cNvPr id="1311002353" name=""/>
           <p:cNvPicPr>
             <a:picLocks noChangeAspect="1"/>
           </p:cNvPicPr>
@@ -5819,7 +5991,7 @@
         </p:nvPicPr>
         <p:blipFill rotWithShape="1">
           <a:blip r:embed="rId5"/>
-          <a:srcRect l="0" t="0" r="0" b="21889"/>
+          <a:srcRect l="0" t="0" r="0" b="21888"/>
           <a:stretch/>
         </p:blipFill>
         <p:spPr bwMode="auto">
@@ -5834,7 +6006,7 @@
       </p:pic>
       <p:pic>
         <p:nvPicPr>
-          <p:cNvPr id="930509780" name=""/>
+          <p:cNvPr id="348110008" name=""/>
           <p:cNvPicPr>
             <a:picLocks noChangeAspect="1"/>
           </p:cNvPicPr>
@@ -5856,7 +6028,7 @@
       </p:pic>
       <p:sp>
         <p:nvSpPr>
-          <p:cNvPr id="88013726" name="Symbol zastępczy zawartości 1"/>
+          <p:cNvPr id="2018945184" name="Symbol zastępczy zawartości 1"/>
           <p:cNvSpPr>
             <a:spLocks noGrp="1"/>
           </p:cNvSpPr>
@@ -5955,7 +6127,7 @@
       </p:sp>
       <p:pic>
         <p:nvPicPr>
-          <p:cNvPr id="188750165" name=""/>
+          <p:cNvPr id="1167993651" name=""/>
           <p:cNvPicPr>
             <a:picLocks noChangeAspect="1"/>
           </p:cNvPicPr>
@@ -5977,7 +6149,7 @@
       </p:pic>
       <p:sp>
         <p:nvSpPr>
-          <p:cNvPr id="302670332" name="Symbol zastępczy zawartości 1"/>
+          <p:cNvPr id="1633138393" name="Symbol zastępczy zawartości 1"/>
           <p:cNvSpPr>
             <a:spLocks noGrp="1"/>
           </p:cNvSpPr>
@@ -5985,7 +6157,7 @@
         </p:nvSpPr>
         <p:spPr bwMode="auto">
           <a:xfrm flipH="0" flipV="0">
-            <a:off x="6890405" y="3718413"/>
+            <a:off x="6890404" y="3718413"/>
             <a:ext cx="4723704" cy="2436201"/>
           </a:xfrm>
         </p:spPr>
@@ -6274,7 +6446,7 @@
       </p:sp>
       <p:pic>
         <p:nvPicPr>
-          <p:cNvPr id="1409123634" name=""/>
+          <p:cNvPr id="1196324276" name=""/>
           <p:cNvPicPr>
             <a:picLocks noChangeAspect="1"/>
           </p:cNvPicPr>
@@ -6296,7 +6468,7 @@
       </p:pic>
       <p:pic>
         <p:nvPicPr>
-          <p:cNvPr id="1322245020" name=""/>
+          <p:cNvPr id="1833545323" name=""/>
           <p:cNvPicPr>
             <a:picLocks noChangeAspect="1"/>
           </p:cNvPicPr>
@@ -6358,7 +6530,7 @@
       </p:grpSpPr>
       <p:sp>
         <p:nvSpPr>
-          <p:cNvPr id="758481731" name="Symbol zastępczy tekstu 3"/>
+          <p:cNvPr id="1140182888" name="Symbol zastępczy tekstu 3"/>
           <p:cNvSpPr>
             <a:spLocks noGrp="1"/>
           </p:cNvSpPr>
@@ -6396,7 +6568,7 @@
       </p:sp>
       <p:sp>
         <p:nvSpPr>
-          <p:cNvPr id="988085277" name="Symbol zastępczy numeru slajdu 5"/>
+          <p:cNvPr id="1133728898" name="Symbol zastępczy numeru slajdu 5"/>
           <p:cNvSpPr>
             <a:spLocks noGrp="1"/>
           </p:cNvSpPr>
@@ -6422,7 +6594,7 @@
       </p:sp>
       <p:pic>
         <p:nvPicPr>
-          <p:cNvPr id="391796608" name=""/>
+          <p:cNvPr id="1742083419" name=""/>
           <p:cNvPicPr>
             <a:picLocks noChangeAspect="1"/>
           </p:cNvPicPr>
@@ -6430,7 +6602,7 @@
         </p:nvPicPr>
         <p:blipFill rotWithShape="1">
           <a:blip r:embed="rId3"/>
-          <a:srcRect l="0" t="0" r="0" b="21889"/>
+          <a:srcRect l="0" t="0" r="0" b="21888"/>
           <a:stretch/>
         </p:blipFill>
         <p:spPr bwMode="auto">
@@ -6445,7 +6617,7 @@
       </p:pic>
       <p:pic>
         <p:nvPicPr>
-          <p:cNvPr id="1425949516" name=""/>
+          <p:cNvPr id="1713543809" name=""/>
           <p:cNvPicPr>
             <a:picLocks noChangeAspect="1"/>
           </p:cNvPicPr>
@@ -6467,7 +6639,7 @@
       </p:pic>
       <p:pic>
         <p:nvPicPr>
-          <p:cNvPr id="211524480" name=""/>
+          <p:cNvPr id="584904504" name=""/>
           <p:cNvPicPr>
             <a:picLocks noChangeAspect="1"/>
           </p:cNvPicPr>
@@ -6489,7 +6661,7 @@
       </p:pic>
       <p:sp>
         <p:nvSpPr>
-          <p:cNvPr id="1051176402" name="Symbol zastępczy zawartości 1"/>
+          <p:cNvPr id="1942218227" name="Symbol zastępczy zawartości 1"/>
           <p:cNvSpPr>
             <a:spLocks noGrp="1"/>
           </p:cNvSpPr>
@@ -6545,7 +6717,7 @@
       </p:sp>
       <p:sp>
         <p:nvSpPr>
-          <p:cNvPr id="1497070285" name="Symbol zastępczy zawartości 1"/>
+          <p:cNvPr id="21705049" name="Symbol zastępczy zawartości 1"/>
           <p:cNvSpPr>
             <a:spLocks noGrp="1"/>
           </p:cNvSpPr>
@@ -6813,6 +6985,651 @@
           </a:p>
         </p:txBody>
       </p:sp>
+    </p:spTree>
+  </p:cSld>
+  <p:clrMapOvr>
+    <a:masterClrMapping/>
+  </p:clrMapOvr>
+  <mc:AlternateContent xmlns:mc="http://schemas.openxmlformats.org/markup-compatibility/2006">
+    <mc:Choice xmlns:p159="http://schemas.microsoft.com/office/powerpoint/2015/09/main" xmlns:p14="http://schemas.microsoft.com/office/powerpoint/2010/main" Requires="p159">
+      <p:transition p14:dur="500" advClick="1"/>
+    </mc:Choice>
+    <mc:Fallback>
+      <p:transition advClick="1"/>
+    </mc:Fallback>
+  </mc:AlternateContent>
+  <p:timing>
+    <p:tnLst>
+      <p:par>
+        <p:cTn id="1" dur="indefinite" restart="never" nodeType="tmRoot"/>
+      </p:par>
+    </p:tnLst>
+  </p:timing>
+</p:sld>
+</file>
+
+<file path=ppt/slides/slide7.xml><?xml version="1.0" encoding="utf-8"?>
+<p:sld xmlns:a="http://schemas.openxmlformats.org/drawingml/2006/main" xmlns:r="http://schemas.openxmlformats.org/officeDocument/2006/relationships" xmlns:p="http://schemas.openxmlformats.org/presentationml/2006/main" xmlns:m="http://schemas.openxmlformats.org/officeDocument/2006/math" xmlns:w="http://schemas.openxmlformats.org/wordprocessingml/2006/main" xmlns:mc="http://schemas.openxmlformats.org/markup-compatibility/2006" showMasterPhAnim="0" showMasterSp="1" show="1">
+  <p:cSld name="">
+    <p:spTree>
+      <p:nvGrpSpPr>
+        <p:cNvPr id="1" name=""/>
+        <p:cNvGrpSpPr/>
+        <p:nvPr/>
+      </p:nvGrpSpPr>
+      <p:grpSpPr bwMode="auto">
+        <a:xfrm>
+          <a:off x="0" y="0"/>
+          <a:ext cx="0" cy="0"/>
+          <a:chOff x="0" y="0"/>
+          <a:chExt cx="0" cy="0"/>
+        </a:xfrm>
+      </p:grpSpPr>
+      <p:sp>
+        <p:nvSpPr>
+          <p:cNvPr id="1285463626" name="Symbol zastępczy tekstu 3"/>
+          <p:cNvSpPr>
+            <a:spLocks noGrp="1"/>
+          </p:cNvSpPr>
+          <p:nvPr>
+            <p:ph type="body" sz="quarter" idx="14"/>
+          </p:nvPr>
+        </p:nvSpPr>
+        <p:spPr bwMode="auto">
+          <a:xfrm flipH="0" flipV="0">
+            <a:off x="644234" y="978980"/>
+            <a:ext cx="8799273" cy="615803"/>
+          </a:xfrm>
+        </p:spPr>
+        <p:txBody>
+          <a:bodyPr/>
+          <a:lstStyle/>
+          <a:p>
+            <a:pPr>
+              <a:defRPr/>
+            </a:pPr>
+            <a:r>
+              <a:rPr lang="en-US" sz="3200" b="0" i="0" u="none" strike="noStrike" cap="none" spc="0">
+                <a:solidFill>
+                  <a:srgbClr val="00494B"/>
+                </a:solidFill>
+                <a:latin typeface="Saira SemiCondensed ExtraBold"/>
+                <a:ea typeface="Saira SemiCondensed ExtraBold"/>
+                <a:cs typeface="Saira SemiCondensed ExtraBold"/>
+              </a:rPr>
+              <a:t>Tested Android operating systems</a:t>
+            </a:r>
+            <a:endParaRPr lang="en-US"/>
+          </a:p>
+        </p:txBody>
+      </p:sp>
+      <p:sp>
+        <p:nvSpPr>
+          <p:cNvPr id="1468608370" name="Symbol zastępczy numeru slajdu 5"/>
+          <p:cNvSpPr>
+            <a:spLocks noGrp="1"/>
+          </p:cNvSpPr>
+          <p:nvPr>
+            <p:ph type="sldNum" sz="quarter" idx="12"/>
+          </p:nvPr>
+        </p:nvSpPr>
+        <p:spPr bwMode="auto"/>
+        <p:txBody>
+          <a:bodyPr/>
+          <a:lstStyle/>
+          <a:p>
+            <a:pPr>
+              <a:defRPr/>
+            </a:pPr>
+            <a:fld id="{16C98AE2-5B27-1353-AD9C-1E8BB66BF80A}" type="slidenum">
+              <a:rPr lang="pl-PL"/>
+              <a:t>6</a:t>
+            </a:fld>
+            <a:endParaRPr/>
+          </a:p>
+        </p:txBody>
+      </p:sp>
+      <p:sp>
+        <p:nvSpPr>
+          <p:cNvPr id="1489734824" name="Symbol zastępczy zawartości 2"/>
+          <p:cNvSpPr>
+            <a:spLocks noGrp="1"/>
+          </p:cNvSpPr>
+          <p:nvPr>
+            <p:ph idx="1"/>
+          </p:nvPr>
+        </p:nvSpPr>
+        <p:spPr bwMode="auto">
+          <a:xfrm flipH="0" flipV="0">
+            <a:off x="644235" y="1825624"/>
+            <a:ext cx="10759225" cy="4351338"/>
+          </a:xfrm>
+        </p:spPr>
+        <p:txBody>
+          <a:bodyPr vertOverflow="overflow" horzOverflow="overflow" vert="horz" wrap="square" lIns="91440" tIns="45720" rIns="91440" bIns="45720" numCol="1" spcCol="0" rtlCol="0" fromWordArt="0" anchor="t" anchorCtr="0" forceAA="0" upright="0" compatLnSpc="0">
+            <a:normAutofit/>
+          </a:bodyPr>
+          <a:lstStyle>
+            <a:lvl1pPr>
+              <a:buClr>
+                <a:srgbClr val="56FF9F"/>
+              </a:buClr>
+              <a:defRPr sz="3000">
+                <a:solidFill>
+                  <a:srgbClr val="575756"/>
+                </a:solidFill>
+                <a:latin typeface="Hanken Grotesk SemiBold"/>
+              </a:defRPr>
+            </a:lvl1pPr>
+            <a:lvl2pPr>
+              <a:buClr>
+                <a:srgbClr val="56FF9F"/>
+              </a:buClr>
+              <a:defRPr>
+                <a:solidFill>
+                  <a:srgbClr val="575756"/>
+                </a:solidFill>
+                <a:latin typeface="Hanken Grotesk SemiBold"/>
+              </a:defRPr>
+            </a:lvl2pPr>
+            <a:lvl3pPr>
+              <a:buClr>
+                <a:srgbClr val="56FF9F"/>
+              </a:buClr>
+              <a:defRPr>
+                <a:solidFill>
+                  <a:srgbClr val="575756"/>
+                </a:solidFill>
+                <a:latin typeface="Hanken Grotesk SemiBold"/>
+              </a:defRPr>
+            </a:lvl3pPr>
+            <a:lvl4pPr>
+              <a:buClr>
+                <a:srgbClr val="56FF9F"/>
+              </a:buClr>
+              <a:defRPr>
+                <a:solidFill>
+                  <a:srgbClr val="575756"/>
+                </a:solidFill>
+                <a:latin typeface="Hanken Grotesk SemiBold"/>
+              </a:defRPr>
+            </a:lvl4pPr>
+            <a:lvl5pPr>
+              <a:buClr>
+                <a:srgbClr val="56FF9F"/>
+              </a:buClr>
+              <a:defRPr sz="1400">
+                <a:solidFill>
+                  <a:srgbClr val="575756"/>
+                </a:solidFill>
+                <a:latin typeface="Hanken Grotesk SemiBold"/>
+              </a:defRPr>
+            </a:lvl5pPr>
+          </a:lstStyle>
+          <a:p>
+            <a:pPr>
+              <a:defRPr/>
+            </a:pPr>
+            <a:r>
+              <a:rPr lang="en-US" sz="2400" b="0" i="0" u="none" strike="noStrike" cap="none" spc="0">
+                <a:solidFill>
+                  <a:srgbClr val="575756"/>
+                </a:solidFill>
+                <a:latin typeface="Hanken Grotesk SemiBold"/>
+                <a:ea typeface="Hanken Grotesk SemiBold"/>
+                <a:cs typeface="Hanken Grotesk SemiBold"/>
+              </a:rPr>
+              <a:t>Stock Android: BP4A.251205.006;</a:t>
+            </a:r>
+            <a:endParaRPr sz="2400" b="0" i="0" u="none" strike="noStrike" cap="none" spc="0">
+              <a:solidFill>
+                <a:srgbClr val="575756"/>
+              </a:solidFill>
+              <a:latin typeface="Hanken Grotesk SemiBold"/>
+              <a:cs typeface="Hanken Grotesk SemiBold"/>
+            </a:endParaRPr>
+          </a:p>
+          <a:p>
+            <a:pPr>
+              <a:defRPr/>
+            </a:pPr>
+            <a:r>
+              <a:rPr lang="en-US" sz="2400" b="0" i="0" u="none" strike="noStrike" cap="none" spc="0">
+                <a:solidFill>
+                  <a:srgbClr val="575756"/>
+                </a:solidFill>
+                <a:latin typeface="Hanken Grotesk SemiBold"/>
+                <a:ea typeface="Hanken Grotesk SemiBold"/>
+                <a:cs typeface="Hanken Grotesk SemiBold"/>
+              </a:rPr>
+              <a:t>LineageOS: lineage-23.0-20251206 (BP2A.250805.005);</a:t>
+            </a:r>
+            <a:endParaRPr sz="2400" b="0" i="0" u="none" strike="noStrike" cap="none" spc="0">
+              <a:solidFill>
+                <a:srgbClr val="575756"/>
+              </a:solidFill>
+              <a:latin typeface="Hanken Grotesk SemiBold"/>
+              <a:cs typeface="Hanken Grotesk SemiBold"/>
+            </a:endParaRPr>
+          </a:p>
+          <a:p>
+            <a:pPr>
+              <a:defRPr/>
+            </a:pPr>
+            <a:r>
+              <a:rPr lang="en-US" sz="2400" b="0" i="0" u="none" strike="noStrike" cap="none" spc="0">
+                <a:solidFill>
+                  <a:srgbClr val="575756"/>
+                </a:solidFill>
+                <a:latin typeface="Hanken Grotesk SemiBold"/>
+                <a:ea typeface="Hanken Grotesk SemiBold"/>
+                <a:cs typeface="Hanken Grotesk SemiBold"/>
+              </a:rPr>
+              <a:t>LineageOS for microG: lineage-23.0-20251203-microG (BP2A.250805.005);</a:t>
+            </a:r>
+            <a:endParaRPr sz="2400" b="0" i="0" u="none" strike="noStrike" cap="none" spc="0">
+              <a:solidFill>
+                <a:srgbClr val="575756"/>
+              </a:solidFill>
+              <a:latin typeface="Hanken Grotesk SemiBold"/>
+              <a:cs typeface="Hanken Grotesk SemiBold"/>
+            </a:endParaRPr>
+          </a:p>
+          <a:p>
+            <a:pPr>
+              <a:defRPr/>
+            </a:pPr>
+            <a:r>
+              <a:rPr lang="en-US" sz="2400" b="0" i="0" u="none" strike="noStrike" cap="none" spc="0">
+                <a:solidFill>
+                  <a:srgbClr val="575756"/>
+                </a:solidFill>
+                <a:latin typeface="Hanken Grotesk SemiBold"/>
+                <a:ea typeface="Hanken Grotesk SemiBold"/>
+                <a:cs typeface="Hanken Grotesk SemiBold"/>
+              </a:rPr>
+              <a:t>GrapheneOS: 2025121200 (BP4A.251205.006);</a:t>
+            </a:r>
+            <a:endParaRPr sz="2400" b="0" i="0" u="none" strike="noStrike" cap="none" spc="0">
+              <a:solidFill>
+                <a:srgbClr val="575756"/>
+              </a:solidFill>
+              <a:latin typeface="Hanken Grotesk SemiBold"/>
+              <a:cs typeface="Hanken Grotesk SemiBold"/>
+            </a:endParaRPr>
+          </a:p>
+          <a:p>
+            <a:pPr>
+              <a:defRPr/>
+            </a:pPr>
+            <a:r>
+              <a:rPr lang="en-US" sz="2400" b="0" i="0" u="none" strike="noStrike" cap="none" spc="0">
+                <a:solidFill>
+                  <a:srgbClr val="575756"/>
+                </a:solidFill>
+                <a:latin typeface="Hanken Grotesk SemiBold"/>
+                <a:ea typeface="Hanken Grotesk SemiBold"/>
+                <a:cs typeface="Hanken Grotesk SemiBold"/>
+              </a:rPr>
+              <a:t>iodéOS: 7.0-20251129-bluejay (BP2A.250805.005).</a:t>
+            </a:r>
+            <a:endParaRPr sz="2400"/>
+          </a:p>
+          <a:p>
+            <a:pPr>
+              <a:defRPr/>
+            </a:pPr>
+            <a:endParaRPr sz="2400"/>
+          </a:p>
+          <a:p>
+            <a:pPr marL="0" indent="0">
+              <a:buClr>
+                <a:srgbClr val="56FF9F"/>
+              </a:buClr>
+              <a:buFont typeface="Arial"/>
+              <a:buNone/>
+              <a:defRPr/>
+            </a:pPr>
+            <a:endParaRPr lang="en-US" sz="2400" b="0" i="0" u="none" strike="noStrike" cap="none" spc="0">
+              <a:solidFill>
+                <a:srgbClr val="575756"/>
+              </a:solidFill>
+              <a:latin typeface="Hanken Grotesk SemiBold"/>
+              <a:cs typeface="Hanken Grotesk SemiBold"/>
+            </a:endParaRPr>
+          </a:p>
+          <a:p>
+            <a:pPr marL="0" indent="0">
+              <a:buClr>
+                <a:srgbClr val="56FF9F"/>
+              </a:buClr>
+              <a:buFont typeface="Arial"/>
+              <a:buNone/>
+              <a:defRPr/>
+            </a:pPr>
+            <a:r>
+              <a:rPr lang="en-US" sz="2000" b="0" i="0" u="none" strike="noStrike" cap="none" spc="0">
+                <a:solidFill>
+                  <a:srgbClr val="575756"/>
+                </a:solidFill>
+                <a:latin typeface="Hanken Grotesk SemiBold"/>
+                <a:ea typeface="Hanken Grotesk SemiBold"/>
+                <a:cs typeface="Hanken Grotesk SemiBold"/>
+              </a:rPr>
+              <a:t>All tested builds are based on</a:t>
+            </a:r>
+            <a:r>
+              <a:rPr lang="pl-PL" sz="2000" b="0" i="0" u="none" strike="noStrike" cap="none" spc="0">
+                <a:solidFill>
+                  <a:srgbClr val="575756"/>
+                </a:solidFill>
+                <a:latin typeface="Hanken Grotesk SemiBold"/>
+                <a:ea typeface="Hanken Grotesk SemiBold"/>
+                <a:cs typeface="Hanken Grotesk SemiBold"/>
+              </a:rPr>
+              <a:t> </a:t>
+            </a:r>
+            <a:r>
+              <a:rPr lang="en-US" sz="2000" b="0" i="0" u="none" strike="noStrike" cap="none" spc="0">
+                <a:solidFill>
+                  <a:srgbClr val="575756"/>
+                </a:solidFill>
+                <a:latin typeface="Hanken Grotesk SemiBold"/>
+                <a:ea typeface="Hanken Grotesk SemiBold"/>
+                <a:cs typeface="Hanken Grotesk SemiBold"/>
+              </a:rPr>
+              <a:t>Android 16 and were obtained in December 2025</a:t>
+            </a:r>
+            <a:r>
+              <a:rPr lang="pl-PL" sz="2000" b="0" i="0" u="none" strike="noStrike" cap="none" spc="0">
+                <a:solidFill>
+                  <a:srgbClr val="575756"/>
+                </a:solidFill>
+                <a:latin typeface="Hanken Grotesk SemiBold"/>
+                <a:cs typeface="Hanken Grotesk SemiBold"/>
+              </a:rPr>
+              <a:t>.</a:t>
+            </a:r>
+            <a:endParaRPr lang="en-US" sz="2000" b="0" i="0" u="none" strike="noStrike" cap="none" spc="0">
+              <a:solidFill>
+                <a:srgbClr val="575756"/>
+              </a:solidFill>
+              <a:latin typeface="Hanken Grotesk SemiBold"/>
+              <a:cs typeface="Hanken Grotesk SemiBold"/>
+            </a:endParaRPr>
+          </a:p>
+          <a:p>
+            <a:pPr marL="0" indent="0">
+              <a:buClr>
+                <a:srgbClr val="56FF9F"/>
+              </a:buClr>
+              <a:buFont typeface="Arial"/>
+              <a:buNone/>
+              <a:defRPr/>
+            </a:pPr>
+            <a:r>
+              <a:rPr lang="en-US" sz="2000" b="0" i="0" u="none" strike="noStrike" cap="none" spc="0">
+                <a:solidFill>
+                  <a:srgbClr val="575756"/>
+                </a:solidFill>
+                <a:latin typeface="Hanken Grotesk SemiBold"/>
+                <a:ea typeface="Hanken Grotesk SemiBold"/>
+                <a:cs typeface="Hanken Grotesk SemiBold"/>
+              </a:rPr>
+              <a:t>The BP4A and BP2A baseline </a:t>
+            </a:r>
+            <a:r>
+              <a:rPr lang="en-US" sz="2000" b="0" i="0" u="none" strike="noStrike" cap="none" spc="0">
+                <a:solidFill>
+                  <a:srgbClr val="575756"/>
+                </a:solidFill>
+                <a:latin typeface="Hanken Grotesk SemiBold"/>
+                <a:ea typeface="Hanken Grotesk SemiBold"/>
+                <a:cs typeface="Hanken Grotesk SemiBold"/>
+              </a:rPr>
+              <a:t>differ due to LineageOS and iodéOS slower update cycle</a:t>
+            </a:r>
+            <a:r>
+              <a:rPr sz="2000"/>
+              <a:t>.</a:t>
+            </a:r>
+            <a:endParaRPr sz="2000"/>
+          </a:p>
+        </p:txBody>
+      </p:sp>
+    </p:spTree>
+  </p:cSld>
+  <p:clrMapOvr>
+    <a:masterClrMapping/>
+  </p:clrMapOvr>
+  <mc:AlternateContent xmlns:mc="http://schemas.openxmlformats.org/markup-compatibility/2006">
+    <mc:Choice xmlns:p159="http://schemas.microsoft.com/office/powerpoint/2015/09/main" xmlns:p14="http://schemas.microsoft.com/office/powerpoint/2010/main" Requires="p159">
+      <p:transition p14:dur="500" advClick="1"/>
+    </mc:Choice>
+    <mc:Fallback>
+      <p:transition advClick="1"/>
+    </mc:Fallback>
+  </mc:AlternateContent>
+  <p:timing>
+    <p:tnLst>
+      <p:par>
+        <p:cTn id="1" dur="indefinite" restart="never" nodeType="tmRoot"/>
+      </p:par>
+    </p:tnLst>
+  </p:timing>
+</p:sld>
+</file>
+
+<file path=ppt/slides/slide8.xml><?xml version="1.0" encoding="utf-8"?>
+<p:sld xmlns:a="http://schemas.openxmlformats.org/drawingml/2006/main" xmlns:r="http://schemas.openxmlformats.org/officeDocument/2006/relationships" xmlns:p="http://schemas.openxmlformats.org/presentationml/2006/main" xmlns:m="http://schemas.openxmlformats.org/officeDocument/2006/math" xmlns:w="http://schemas.openxmlformats.org/wordprocessingml/2006/main" xmlns:mc="http://schemas.openxmlformats.org/markup-compatibility/2006" showMasterPhAnim="0" showMasterSp="1" show="1">
+  <p:cSld name="">
+    <p:spTree>
+      <p:nvGrpSpPr>
+        <p:cNvPr id="1" name=""/>
+        <p:cNvGrpSpPr/>
+        <p:nvPr/>
+      </p:nvGrpSpPr>
+      <p:grpSpPr bwMode="auto">
+        <a:xfrm>
+          <a:off x="0" y="0"/>
+          <a:ext cx="0" cy="0"/>
+          <a:chOff x="0" y="0"/>
+          <a:chExt cx="0" cy="0"/>
+        </a:xfrm>
+      </p:grpSpPr>
+      <p:sp>
+        <p:nvSpPr>
+          <p:cNvPr id="589131708" name="Symbol zastępczy tekstu 3"/>
+          <p:cNvSpPr>
+            <a:spLocks noGrp="1"/>
+          </p:cNvSpPr>
+          <p:nvPr>
+            <p:ph type="body" sz="quarter" idx="14"/>
+          </p:nvPr>
+        </p:nvSpPr>
+        <p:spPr bwMode="auto">
+          <a:xfrm flipH="0" flipV="0">
+            <a:off x="644234" y="978980"/>
+            <a:ext cx="8799273" cy="615803"/>
+          </a:xfrm>
+        </p:spPr>
+        <p:txBody>
+          <a:bodyPr/>
+          <a:lstStyle/>
+          <a:p>
+            <a:pPr>
+              <a:defRPr/>
+            </a:pPr>
+            <a:r>
+              <a:rPr lang="en-US" sz="3200" b="0" i="0" u="none" strike="noStrike" cap="none" spc="0">
+                <a:solidFill>
+                  <a:srgbClr val="00494B"/>
+                </a:solidFill>
+                <a:latin typeface="Saira SemiCondensed ExtraBold"/>
+                <a:ea typeface="Saira SemiCondensed ExtraBold"/>
+                <a:cs typeface="Saira SemiCondensed ExtraBold"/>
+              </a:rPr>
+              <a:t>Experiment design</a:t>
+            </a:r>
+            <a:endParaRPr lang="en-US"/>
+          </a:p>
+        </p:txBody>
+      </p:sp>
+      <p:sp>
+        <p:nvSpPr>
+          <p:cNvPr id="1091573612" name="Symbol zastępczy numeru slajdu 5"/>
+          <p:cNvSpPr>
+            <a:spLocks noGrp="1"/>
+          </p:cNvSpPr>
+          <p:nvPr>
+            <p:ph type="sldNum" sz="quarter" idx="12"/>
+          </p:nvPr>
+        </p:nvSpPr>
+        <p:spPr bwMode="auto"/>
+        <p:txBody>
+          <a:bodyPr/>
+          <a:lstStyle/>
+          <a:p>
+            <a:pPr>
+              <a:defRPr/>
+            </a:pPr>
+            <a:fld id="{C244BF9F-A158-56B1-43F0-882D5149ABE4}" type="slidenum">
+              <a:rPr lang="pl-PL"/>
+              <a:t>7</a:t>
+            </a:fld>
+            <a:endParaRPr/>
+          </a:p>
+        </p:txBody>
+      </p:sp>
+      <p:sp>
+        <p:nvSpPr>
+          <p:cNvPr id="379730068" name="Symbol zastępczy zawartości 2"/>
+          <p:cNvSpPr>
+            <a:spLocks noGrp="1"/>
+          </p:cNvSpPr>
+          <p:nvPr>
+            <p:ph idx="1"/>
+          </p:nvPr>
+        </p:nvSpPr>
+        <p:spPr bwMode="auto">
+          <a:xfrm flipH="0" flipV="0">
+            <a:off x="644235" y="5083052"/>
+            <a:ext cx="10759225" cy="1332034"/>
+          </a:xfrm>
+        </p:spPr>
+        <p:txBody>
+          <a:bodyPr vertOverflow="overflow" horzOverflow="overflow" vert="horz" wrap="square" lIns="91440" tIns="45720" rIns="91440" bIns="45720" numCol="1" spcCol="0" rtlCol="0" fromWordArt="0" anchor="t" anchorCtr="0" forceAA="0" upright="0" compatLnSpc="0">
+            <a:normAutofit fontScale="80000" lnSpcReduction="4000"/>
+          </a:bodyPr>
+          <a:lstStyle>
+            <a:lvl1pPr>
+              <a:buClr>
+                <a:srgbClr val="56FF9F"/>
+              </a:buClr>
+              <a:defRPr sz="3000">
+                <a:solidFill>
+                  <a:srgbClr val="575756"/>
+                </a:solidFill>
+                <a:latin typeface="Hanken Grotesk SemiBold"/>
+              </a:defRPr>
+            </a:lvl1pPr>
+            <a:lvl2pPr>
+              <a:buClr>
+                <a:srgbClr val="56FF9F"/>
+              </a:buClr>
+              <a:defRPr>
+                <a:solidFill>
+                  <a:srgbClr val="575756"/>
+                </a:solidFill>
+                <a:latin typeface="Hanken Grotesk SemiBold"/>
+              </a:defRPr>
+            </a:lvl2pPr>
+            <a:lvl3pPr>
+              <a:buClr>
+                <a:srgbClr val="56FF9F"/>
+              </a:buClr>
+              <a:defRPr>
+                <a:solidFill>
+                  <a:srgbClr val="575756"/>
+                </a:solidFill>
+                <a:latin typeface="Hanken Grotesk SemiBold"/>
+              </a:defRPr>
+            </a:lvl3pPr>
+            <a:lvl4pPr>
+              <a:buClr>
+                <a:srgbClr val="56FF9F"/>
+              </a:buClr>
+              <a:defRPr>
+                <a:solidFill>
+                  <a:srgbClr val="575756"/>
+                </a:solidFill>
+                <a:latin typeface="Hanken Grotesk SemiBold"/>
+              </a:defRPr>
+            </a:lvl4pPr>
+            <a:lvl5pPr>
+              <a:buClr>
+                <a:srgbClr val="56FF9F"/>
+              </a:buClr>
+              <a:defRPr sz="1400">
+                <a:solidFill>
+                  <a:srgbClr val="575756"/>
+                </a:solidFill>
+                <a:latin typeface="Hanken Grotesk SemiBold"/>
+              </a:defRPr>
+            </a:lvl5pPr>
+          </a:lstStyle>
+          <a:p>
+            <a:pPr marL="0" indent="0">
+              <a:buClr>
+                <a:srgbClr val="56FF9F"/>
+              </a:buClr>
+              <a:buFont typeface="Arial"/>
+              <a:buNone/>
+              <a:defRPr/>
+            </a:pPr>
+            <a:r>
+              <a:rPr lang="en-US" sz="2400" b="0" i="0" u="none" strike="noStrike" cap="none" spc="0">
+                <a:solidFill>
+                  <a:srgbClr val="575756"/>
+                </a:solidFill>
+                <a:latin typeface="Hanken Grotesk SemiBold"/>
+                <a:ea typeface="Hanken Grotesk SemiBold"/>
+                <a:cs typeface="Hanken Grotesk SemiBold"/>
+              </a:rPr>
+              <a:t>Measurement setup. The Android device running the investigated operating systems is configured to access the Internet using Wi-Fi. The access point is hosted on a Linux computer, running traffic interception and capture software. A custom system certificate is installed on the phone using root access. A USB connection is used for ADB/Frida communication.</a:t>
+            </a:r>
+            <a:endParaRPr sz="2400" b="0" i="0" u="none" strike="noStrike" cap="none" spc="0">
+              <a:solidFill>
+                <a:srgbClr val="575756"/>
+              </a:solidFill>
+              <a:latin typeface="Hanken Grotesk SemiBold"/>
+              <a:cs typeface="Hanken Grotesk SemiBold"/>
+            </a:endParaRPr>
+          </a:p>
+        </p:txBody>
+      </p:sp>
+      <p:pic>
+        <p:nvPicPr>
+          <p:cNvPr id="1655968521" name=""/>
+          <p:cNvPicPr>
+            <a:picLocks noChangeAspect="1"/>
+          </p:cNvPicPr>
+          <p:nvPr/>
+        </p:nvPicPr>
+        <p:blipFill rotWithShape="1">
+          <a:blip r:embed="rId3"/>
+          <a:stretch/>
+        </p:blipFill>
+        <p:spPr bwMode="auto">
+          <a:xfrm flipH="0" flipV="0">
+            <a:off x="945190" y="1521515"/>
+            <a:ext cx="10157316" cy="3375542"/>
+          </a:xfrm>
+          <a:prstGeom prst="rect">
+            <a:avLst/>
+          </a:prstGeom>
+        </p:spPr>
+      </p:pic>
     </p:spTree>
   </p:cSld>
   <p:clrMapOvr>
